--- a/3x3_version/demo.pptx
+++ b/3x3_version/demo.pptx
@@ -3989,8 +3989,8 @@
           </a:p>
         </p:txBody>
       </p:sp>
-      <mc:AlternateContent xmlns:mc="http://schemas.openxmlformats.org/markup-compatibility/2006">
-        <mc:Choice xmlns:a14="http://schemas.microsoft.com/office/drawing/2010/main" Requires="a14">
+      <mc:AlternateContent xmlns:mc="http://schemas.openxmlformats.org/markup-compatibility/2006" xmlns:a14="http://schemas.microsoft.com/office/drawing/2010/main">
+        <mc:Choice Requires="a14">
           <p:sp>
             <p:nvSpPr>
               <p:cNvPr id="47" name="TextBox 46">
@@ -4019,6 +4019,7 @@
               </a:bodyPr>
               <a:lstStyle/>
               <a:p>
+                <a:pPr/>
                 <a14:m>
                   <m:oMathPara xmlns:m="http://schemas.openxmlformats.org/officeDocument/2006/math">
                     <m:oMathParaPr>
@@ -4131,7 +4132,7 @@
             </p:txBody>
           </p:sp>
         </mc:Choice>
-        <mc:Fallback>
+        <mc:Fallback xmlns="">
           <p:sp>
             <p:nvSpPr>
               <p:cNvPr id="47" name="TextBox 46">
@@ -4176,8 +4177,8 @@
           </p:sp>
         </mc:Fallback>
       </mc:AlternateContent>
-      <mc:AlternateContent xmlns:mc="http://schemas.openxmlformats.org/markup-compatibility/2006">
-        <mc:Choice xmlns:a14="http://schemas.microsoft.com/office/drawing/2010/main" Requires="a14">
+      <mc:AlternateContent xmlns:mc="http://schemas.openxmlformats.org/markup-compatibility/2006" xmlns:a14="http://schemas.microsoft.com/office/drawing/2010/main">
+        <mc:Choice Requires="a14">
           <p:sp>
             <p:nvSpPr>
               <p:cNvPr id="48" name="TextBox 47">
@@ -4206,6 +4207,7 @@
               </a:bodyPr>
               <a:lstStyle/>
               <a:p>
+                <a:pPr/>
                 <a14:m>
                   <m:oMathPara xmlns:m="http://schemas.openxmlformats.org/officeDocument/2006/math">
                     <m:oMathParaPr>
@@ -4318,7 +4320,7 @@
             </p:txBody>
           </p:sp>
         </mc:Choice>
-        <mc:Fallback>
+        <mc:Fallback xmlns="">
           <p:sp>
             <p:nvSpPr>
               <p:cNvPr id="48" name="TextBox 47">
@@ -4363,8 +4365,8 @@
           </p:sp>
         </mc:Fallback>
       </mc:AlternateContent>
-      <mc:AlternateContent xmlns:mc="http://schemas.openxmlformats.org/markup-compatibility/2006">
-        <mc:Choice xmlns:a14="http://schemas.microsoft.com/office/drawing/2010/main" Requires="a14">
+      <mc:AlternateContent xmlns:mc="http://schemas.openxmlformats.org/markup-compatibility/2006" xmlns:a14="http://schemas.microsoft.com/office/drawing/2010/main">
+        <mc:Choice Requires="a14">
           <p:sp>
             <p:nvSpPr>
               <p:cNvPr id="51" name="TextBox 50">
@@ -4393,6 +4395,7 @@
               </a:bodyPr>
               <a:lstStyle/>
               <a:p>
+                <a:pPr/>
                 <a14:m>
                   <m:oMathPara xmlns:m="http://schemas.openxmlformats.org/officeDocument/2006/math">
                     <m:oMathParaPr>
@@ -4414,7 +4417,7 @@
             </p:txBody>
           </p:sp>
         </mc:Choice>
-        <mc:Fallback>
+        <mc:Fallback xmlns="">
           <p:sp>
             <p:nvSpPr>
               <p:cNvPr id="51" name="TextBox 50">
@@ -4459,8 +4462,8 @@
           </p:sp>
         </mc:Fallback>
       </mc:AlternateContent>
-      <mc:AlternateContent xmlns:mc="http://schemas.openxmlformats.org/markup-compatibility/2006">
-        <mc:Choice xmlns:a14="http://schemas.microsoft.com/office/drawing/2010/main" Requires="a14">
+      <mc:AlternateContent xmlns:mc="http://schemas.openxmlformats.org/markup-compatibility/2006" xmlns:a14="http://schemas.microsoft.com/office/drawing/2010/main">
+        <mc:Choice Requires="a14">
           <p:sp>
             <p:nvSpPr>
               <p:cNvPr id="52" name="TextBox 51">
@@ -4489,6 +4492,7 @@
               </a:bodyPr>
               <a:lstStyle/>
               <a:p>
+                <a:pPr/>
                 <a14:m>
                   <m:oMathPara xmlns:m="http://schemas.openxmlformats.org/officeDocument/2006/math">
                     <m:oMathParaPr>
@@ -4520,7 +4524,13 @@
                               <a:rPr lang="en-US" altLang="zh-CN" b="0" i="1" smtClean="0">
                                 <a:latin typeface="Cambria Math" panose="02040503050406030204" pitchFamily="18" charset="0"/>
                               </a:rPr>
-                              <m:t>30</m:t>
+                              <m:t>3</m:t>
+                            </m:r>
+                            <m:r>
+                              <a:rPr lang="en-US" altLang="zh-CN" b="0" i="1" smtClean="0">
+                                <a:latin typeface="Cambria Math" panose="02040503050406030204" pitchFamily="18" charset="0"/>
+                              </a:rPr>
+                              <m:t>0</m:t>
                             </m:r>
                           </m:e>
                           <m:e>
@@ -4601,7 +4611,7 @@
             </p:txBody>
           </p:sp>
         </mc:Choice>
-        <mc:Fallback>
+        <mc:Fallback xmlns="">
           <p:sp>
             <p:nvSpPr>
               <p:cNvPr id="52" name="TextBox 51">
@@ -4646,8 +4656,8 @@
           </p:sp>
         </mc:Fallback>
       </mc:AlternateContent>
-      <mc:AlternateContent xmlns:mc="http://schemas.openxmlformats.org/markup-compatibility/2006">
-        <mc:Choice xmlns:a14="http://schemas.microsoft.com/office/drawing/2010/main" Requires="a14">
+      <mc:AlternateContent xmlns:mc="http://schemas.openxmlformats.org/markup-compatibility/2006" xmlns:a14="http://schemas.microsoft.com/office/drawing/2010/main">
+        <mc:Choice Requires="a14">
           <p:sp>
             <p:nvSpPr>
               <p:cNvPr id="53" name="TextBox 52">
@@ -4676,6 +4686,7 @@
               </a:bodyPr>
               <a:lstStyle/>
               <a:p>
+                <a:pPr/>
                 <a14:m>
                   <m:oMathPara xmlns:m="http://schemas.openxmlformats.org/officeDocument/2006/math">
                     <m:oMathParaPr>
@@ -4788,7 +4799,7 @@
             </p:txBody>
           </p:sp>
         </mc:Choice>
-        <mc:Fallback>
+        <mc:Fallback xmlns="">
           <p:sp>
             <p:nvSpPr>
               <p:cNvPr id="53" name="TextBox 52">
@@ -4833,8 +4844,8 @@
           </p:sp>
         </mc:Fallback>
       </mc:AlternateContent>
-      <mc:AlternateContent xmlns:mc="http://schemas.openxmlformats.org/markup-compatibility/2006">
-        <mc:Choice xmlns:a14="http://schemas.microsoft.com/office/drawing/2010/main" Requires="a14">
+      <mc:AlternateContent xmlns:mc="http://schemas.openxmlformats.org/markup-compatibility/2006" xmlns:a14="http://schemas.microsoft.com/office/drawing/2010/main">
+        <mc:Choice Requires="a14">
           <p:sp>
             <p:nvSpPr>
               <p:cNvPr id="54" name="TextBox 53">
@@ -4863,6 +4874,7 @@
               </a:bodyPr>
               <a:lstStyle/>
               <a:p>
+                <a:pPr/>
                 <a14:m>
                   <m:oMathPara xmlns:m="http://schemas.openxmlformats.org/officeDocument/2006/math">
                     <m:oMathParaPr>
@@ -4884,7 +4896,7 @@
             </p:txBody>
           </p:sp>
         </mc:Choice>
-        <mc:Fallback>
+        <mc:Fallback xmlns="">
           <p:sp>
             <p:nvSpPr>
               <p:cNvPr id="54" name="TextBox 53">
@@ -4929,8 +4941,8 @@
           </p:sp>
         </mc:Fallback>
       </mc:AlternateContent>
-      <mc:AlternateContent xmlns:mc="http://schemas.openxmlformats.org/markup-compatibility/2006">
-        <mc:Choice xmlns:a14="http://schemas.microsoft.com/office/drawing/2010/main" Requires="a14">
+      <mc:AlternateContent xmlns:mc="http://schemas.openxmlformats.org/markup-compatibility/2006" xmlns:a14="http://schemas.microsoft.com/office/drawing/2010/main">
+        <mc:Choice Requires="a14">
           <p:sp>
             <p:nvSpPr>
               <p:cNvPr id="55" name="TextBox 54">
@@ -4959,6 +4971,7 @@
               </a:bodyPr>
               <a:lstStyle/>
               <a:p>
+                <a:pPr/>
                 <a14:m>
                   <m:oMathPara xmlns:m="http://schemas.openxmlformats.org/officeDocument/2006/math">
                     <m:oMathParaPr>
@@ -4982,7 +4995,7 @@
             </p:txBody>
           </p:sp>
         </mc:Choice>
-        <mc:Fallback>
+        <mc:Fallback xmlns="">
           <p:sp>
             <p:nvSpPr>
               <p:cNvPr id="55" name="TextBox 54">
@@ -5027,8 +5040,8 @@
           </p:sp>
         </mc:Fallback>
       </mc:AlternateContent>
-      <mc:AlternateContent xmlns:mc="http://schemas.openxmlformats.org/markup-compatibility/2006">
-        <mc:Choice xmlns:a14="http://schemas.microsoft.com/office/drawing/2010/main" Requires="a14">
+      <mc:AlternateContent xmlns:mc="http://schemas.openxmlformats.org/markup-compatibility/2006" xmlns:a14="http://schemas.microsoft.com/office/drawing/2010/main">
+        <mc:Choice Requires="a14">
           <p:sp>
             <p:nvSpPr>
               <p:cNvPr id="56" name="TextBox 55">
@@ -5057,6 +5070,7 @@
               </a:bodyPr>
               <a:lstStyle/>
               <a:p>
+                <a:pPr/>
                 <a14:m>
                   <m:oMathPara xmlns:m="http://schemas.openxmlformats.org/officeDocument/2006/math">
                     <m:oMathParaPr>
@@ -5169,7 +5183,7 @@
             </p:txBody>
           </p:sp>
         </mc:Choice>
-        <mc:Fallback>
+        <mc:Fallback xmlns="">
           <p:sp>
             <p:nvSpPr>
               <p:cNvPr id="56" name="TextBox 55">
@@ -5214,6 +5228,75 @@
           </p:sp>
         </mc:Fallback>
       </mc:AlternateContent>
+      <p:sp>
+        <p:nvSpPr>
+          <p:cNvPr id="3" name="TextBox 2">
+            <a:extLst>
+              <a:ext uri="{FF2B5EF4-FFF2-40B4-BE49-F238E27FC236}">
+                <a16:creationId xmlns:a16="http://schemas.microsoft.com/office/drawing/2014/main" id="{C51B4DAF-A5D1-1C84-ADAA-FDD9A0D19D60}"/>
+              </a:ext>
+            </a:extLst>
+          </p:cNvPr>
+          <p:cNvSpPr txBox="1"/>
+          <p:nvPr/>
+        </p:nvSpPr>
+        <p:spPr>
+          <a:xfrm>
+            <a:off x="144208" y="5550588"/>
+            <a:ext cx="6974858" cy="923330"/>
+          </a:xfrm>
+          <a:prstGeom prst="rect">
+            <a:avLst/>
+          </a:prstGeom>
+          <a:noFill/>
+        </p:spPr>
+        <p:txBody>
+          <a:bodyPr wrap="none" rtlCol="0">
+            <a:spAutoFit/>
+          </a:bodyPr>
+          <a:lstStyle/>
+          <a:p>
+            <a:r>
+              <a:rPr lang="en-US" dirty="0"/>
+              <a:t>Source</a:t>
+            </a:r>
+            <a:r>
+              <a:rPr lang="zh-CN" altLang="en-US" dirty="0"/>
+              <a:t> </a:t>
+            </a:r>
+            <a:r>
+              <a:rPr lang="en-US" altLang="zh-CN" dirty="0"/>
+              <a:t>code:</a:t>
+            </a:r>
+            <a:endParaRPr lang="en-US" dirty="0"/>
+          </a:p>
+          <a:p>
+            <a:r>
+              <a:rPr lang="en-US" dirty="0">
+                <a:hlinkClick r:id="rId10"/>
+              </a:rPr>
+              <a:t>https://github.com/runyangtian/2x2_systolic_array_double_buffer.git</a:t>
+            </a:r>
+            <a:endParaRPr lang="en-US" dirty="0"/>
+          </a:p>
+          <a:p>
+            <a:r>
+              <a:rPr lang="en-US" dirty="0"/>
+              <a:t>Find </a:t>
+            </a:r>
+            <a:r>
+              <a:rPr lang="en-US" dirty="0">
+                <a:hlinkClick r:id="rId11" tooltip="3x3_version"/>
+              </a:rPr>
+              <a:t>3x3_version</a:t>
+            </a:r>
+            <a:r>
+              <a:rPr lang="en-US" dirty="0"/>
+              <a:t> folder</a:t>
+            </a:r>
+          </a:p>
+        </p:txBody>
+      </p:sp>
     </p:spTree>
     <p:extLst>
       <p:ext uri="{BB962C8B-B14F-4D97-AF65-F5344CB8AC3E}">
